--- a/RCMES-MCP_Introduction.pptx
+++ b/RCMES-MCP_Introduction.pptx
@@ -21,6 +21,7 @@
     <p:sldId id="261" r:id="rId5"/>
     <p:sldId id="262" r:id="rId4"/>
     <p:sldId id="263" r:id="rId18"/>
+    <p:sldId id="265" r:id="rId20"/>
     <p:sldId id="264" r:id="rId19"/>
   </p:sldIdLst>
   <p:sldSz cx="9144000" cy="5143500" type="screen16x9"/>
@@ -16633,6 +16634,215 @@
           <a:p>
             <a:r>
               <a:t>March 2026</a:t>
+            </a:r>
+          </a:p>
+        </p:txBody>
+      </p:sp>
+    </p:spTree>
+  </p:cSld>
+  <p:clrMapOvr>
+    <a:masterClrMapping/>
+  </p:clrMapOvr>
+</p:sld>
+</file>
+
+<file path=ppt/slides/slide10.xml><?xml version="1.0" encoding="utf-8"?>
+<p:sld xmlns:a="http://schemas.openxmlformats.org/drawingml/2006/main" xmlns:p="http://schemas.openxmlformats.org/presentationml/2006/main" xmlns:r="http://schemas.openxmlformats.org/officeDocument/2006/relationships">
+  <p:cSld>
+    <p:spTree>
+      <p:nvGrpSpPr>
+        <p:cNvPr id="1" name=""/>
+        <p:cNvGrpSpPr/>
+        <p:nvPr/>
+      </p:nvGrpSpPr>
+      <p:grpSpPr/>
+      <p:sp>
+        <p:nvSpPr>
+          <p:cNvPr id="2" name="Text Placeholder 1"/>
+          <p:cNvSpPr>
+            <a:spLocks noGrp="1"/>
+          </p:cNvSpPr>
+          <p:nvPr>
+            <p:ph type="body" idx="17" sz="quarter"/>
+          </p:nvPr>
+        </p:nvSpPr>
+        <p:spPr/>
+        <p:txBody>
+          <a:bodyPr/>
+          <a:lstStyle/>
+          <a:p>
+            <a:r>
+              <a:t>RCMES-MCP</a:t>
+            </a:r>
+          </a:p>
+        </p:txBody>
+      </p:sp>
+      <p:sp>
+        <p:nvSpPr>
+          <p:cNvPr id="3" name="Title 2"/>
+          <p:cNvSpPr>
+            <a:spLocks noGrp="1"/>
+          </p:cNvSpPr>
+          <p:nvPr>
+            <p:ph type="title"/>
+          </p:nvPr>
+        </p:nvSpPr>
+        <p:spPr/>
+        <p:txBody>
+          <a:bodyPr/>
+          <a:lstStyle/>
+          <a:p>
+            <a:r>
+              <a:t>Development Roadmap: Years 2-3</a:t>
+            </a:r>
+          </a:p>
+        </p:txBody>
+      </p:sp>
+      <p:sp>
+        <p:nvSpPr>
+          <p:cNvPr id="4" name="Text Placeholder 3"/>
+          <p:cNvSpPr>
+            <a:spLocks noGrp="1"/>
+          </p:cNvSpPr>
+          <p:nvPr>
+            <p:ph type="body" idx="14" sz="quarter"/>
+          </p:nvPr>
+        </p:nvSpPr>
+        <p:spPr/>
+        <p:txBody>
+          <a:bodyPr/>
+          <a:lstStyle/>
+          <a:p>
+            <a:r>
+              <a:t>Next Steps for Expanding Capability, Community, and Impact (2027-2028)</a:t>
+            </a:r>
+          </a:p>
+        </p:txBody>
+      </p:sp>
+      <p:sp>
+        <p:nvSpPr>
+          <p:cNvPr id="5" name="Content Placeholder 4"/>
+          <p:cNvSpPr>
+            <a:spLocks noGrp="1"/>
+          </p:cNvSpPr>
+          <p:nvPr>
+            <p:ph idx="19" sz="quarter"/>
+          </p:nvPr>
+        </p:nvSpPr>
+        <p:spPr/>
+        <p:txBody>
+          <a:bodyPr/>
+          <a:lstStyle/>
+          <a:p>
+            <a:r>
+              <a:rPr b="1"/>
+              <a:t>Year 2 (FY2027)</a:t>
+            </a:r>
+          </a:p>
+          <a:p>
+            <a:pPr/>
+            <a:r>
+              <a:t>Integrate MERRA-2, ECCO &amp; GLDAS observational datasets</a:t>
+            </a:r>
+          </a:p>
+          <a:p>
+            <a:pPr/>
+            <a:r>
+              <a:t>Model evaluation framework: obs vs. CMIP6 bias/skill scoring</a:t>
+            </a:r>
+          </a:p>
+          <a:p>
+            <a:pPr/>
+            <a:r>
+              <a:t>Multi-model ensemble analysis with model weighting</a:t>
+            </a:r>
+          </a:p>
+          <a:p>
+            <a:pPr/>
+            <a:r>
+              <a:t>NASA Earthdata authentication &amp; access integration</a:t>
+            </a:r>
+          </a:p>
+          <a:p>
+            <a:pPr/>
+            <a:r>
+              <a:t>Automated reproducible report generation (PDF/HTML)</a:t>
+            </a:r>
+          </a:p>
+          <a:p>
+            <a:pPr/>
+            <a:r>
+              <a:t>Agent-to-Agent (A2A) protocol support for multi-agent workflows</a:t>
+            </a:r>
+          </a:p>
+          <a:p>
+            <a:pPr/>
+            <a:r>
+              <a:t>Performance optimization: Dask distributed scheduling at scale</a:t>
+            </a:r>
+          </a:p>
+        </p:txBody>
+      </p:sp>
+      <p:sp>
+        <p:nvSpPr>
+          <p:cNvPr id="6" name="Content Placeholder 5"/>
+          <p:cNvSpPr>
+            <a:spLocks noGrp="1"/>
+          </p:cNvSpPr>
+          <p:nvPr>
+            <p:ph idx="20" sz="quarter"/>
+          </p:nvPr>
+        </p:nvSpPr>
+        <p:spPr/>
+        <p:txBody>
+          <a:bodyPr/>
+          <a:lstStyle/>
+          <a:p>
+            <a:r>
+              <a:rPr b="1"/>
+              <a:t>Year 3 (FY2028)</a:t>
+            </a:r>
+          </a:p>
+          <a:p>
+            <a:pPr/>
+            <a:r>
+              <a:t>Expand to full CMIP7 dataset support when available</a:t>
+            </a:r>
+          </a:p>
+          <a:p>
+            <a:pPr/>
+            <a:r>
+              <a:t>Community plugin architecture for user-contributed tools</a:t>
+            </a:r>
+          </a:p>
+          <a:p>
+            <a:pPr/>
+            <a:r>
+              <a:t>Uncertainty quantification &amp; confidence intervals in all outputs</a:t>
+            </a:r>
+          </a:p>
+          <a:p>
+            <a:pPr/>
+            <a:r>
+              <a:t>Regional downscaling pipelines (LOCA2, STAR-ESDM)</a:t>
+            </a:r>
+          </a:p>
+          <a:p>
+            <a:pPr/>
+            <a:r>
+              <a:t>Policy-ready climate risk assessment workflows</a:t>
+            </a:r>
+          </a:p>
+          <a:p>
+            <a:pPr/>
+            <a:r>
+              <a:t>Integration with Jupyter/CoPilot ecosystems</a:t>
+            </a:r>
+          </a:p>
+          <a:p>
+            <a:pPr/>
+            <a:r>
+              <a:t>Multi-language support for global accessibility</a:t>
             </a:r>
           </a:p>
         </p:txBody>

--- a/RCMES-MCP_Introduction.pptx
+++ b/RCMES-MCP_Introduction.pptx
@@ -20,6 +20,7 @@
     <p:sldId id="260" r:id="rId6"/>
     <p:sldId id="261" r:id="rId5"/>
     <p:sldId id="262" r:id="rId4"/>
+    <p:sldId id="266" r:id="rId21"/>
     <p:sldId id="263" r:id="rId18"/>
     <p:sldId id="265" r:id="rId20"/>
     <p:sldId id="264" r:id="rId19"/>
@@ -16656,6 +16657,24 @@
         <p:nvPr/>
       </p:nvGrpSpPr>
       <p:grpSpPr/>
+    </p:spTree>
+  </p:cSld>
+  <p:clrMapOvr>
+    <a:masterClrMapping/>
+  </p:clrMapOvr>
+</p:sld>
+</file>
+
+<file path=ppt/slides/slide11.xml><?xml version="1.0" encoding="utf-8"?>
+<p:sld xmlns:a="http://schemas.openxmlformats.org/drawingml/2006/main" xmlns:p="http://schemas.openxmlformats.org/presentationml/2006/main" xmlns:r="http://schemas.openxmlformats.org/officeDocument/2006/relationships">
+  <p:cSld>
+    <p:spTree>
+      <p:nvGrpSpPr>
+        <p:cNvPr id="1" name=""/>
+        <p:cNvGrpSpPr/>
+        <p:nvPr/>
+      </p:nvGrpSpPr>
+      <p:grpSpPr/>
       <p:sp>
         <p:nvSpPr>
           <p:cNvPr id="2" name="Text Placeholder 1"/>
@@ -16693,7 +16712,7 @@
           <a:lstStyle/>
           <a:p>
             <a:r>
-              <a:t>Development Roadmap: Years 2-3</a:t>
+              <a:t>Performance Enhancements</a:t>
             </a:r>
           </a:p>
         </p:txBody>
@@ -16714,7 +16733,7 @@
           <a:lstStyle/>
           <a:p>
             <a:r>
-              <a:t>Next Steps for Expanding Capability, Community, and Impact (2027-2028)</a:t>
+              <a:t>7 Optimizations for Fast Data Loading</a:t>
             </a:r>
           </a:p>
         </p:txBody>
@@ -16734,115 +16753,87 @@
           <a:bodyPr/>
           <a:lstStyle/>
           <a:p>
+            <a:pPr/>
             <a:r>
               <a:rPr b="1"/>
-              <a:t>Year 2 (FY2027)</a:t>
-            </a:r>
-          </a:p>
+              <a:t>Data Access Optimizations</a:t>
+            </a:r>
+          </a:p>
+          <a:p>
+            <a:pPr lvl="1"/>
+            <a:r>
+              <a:t>Local Zarr Store: RCMES_LOCAL_DATA_DIR bypasses S3 entirely for pre-downloaded data</a:t>
+            </a:r>
+          </a:p>
+          <a:p>
+            <a:pPr lvl="1"/>
+            <a:r>
+              <a:t>Kerchunk Reference Caching: Parquet metadata files cached locally, eliminating 1–5s S3 round-trip per query</a:t>
+            </a:r>
+          </a:p>
+          <a:p>
+            <a:pPr lvl="1"/>
+            <a:r>
+              <a:t>Optimized Dask Chunking: Explicit chunk sizes (time=365, lat=100, lon=100) for better parallelism</a:t>
+            </a:r>
+          </a:p>
+          <a:p>
+            <a:pPr lvl="1"/>
+            <a:r>
+              <a:t>Connection Pool Tuning: 50 concurrent S3 connections (up from 25) with 120s read timeout</a:t>
+            </a:r>
+          </a:p>
+        </p:txBody>
+      </p:sp>
+      <p:sp>
+        <p:nvSpPr>
+          <p:cNvPr id="6" name="Content Placeholder 5"/>
+          <p:cNvSpPr>
+            <a:spLocks noGrp="1"/>
+          </p:cNvSpPr>
+          <p:nvPr>
+            <p:ph idx="20" sz="quarter"/>
+          </p:nvPr>
+        </p:nvSpPr>
+        <p:spPr/>
+        <p:txBody>
+          <a:bodyPr/>
+          <a:lstStyle/>
           <a:p>
             <a:pPr/>
             <a:r>
-              <a:t>Integrate MERRA-2, ECCO &amp; GLDAS observational datasets</a:t>
-            </a:r>
-          </a:p>
-          <a:p>
-            <a:pPr/>
-            <a:r>
-              <a:t>Model evaluation framework: obs vs. CMIP6 bias/skill scoring</a:t>
-            </a:r>
-          </a:p>
-          <a:p>
-            <a:pPr/>
-            <a:r>
-              <a:t>Multi-model ensemble analysis with model weighting</a:t>
-            </a:r>
-          </a:p>
-          <a:p>
-            <a:pPr/>
-            <a:r>
-              <a:t>NASA Earthdata authentication &amp; access integration</a:t>
-            </a:r>
-          </a:p>
-          <a:p>
-            <a:pPr/>
-            <a:r>
-              <a:t>Automated reproducible report generation (PDF/HTML)</a:t>
-            </a:r>
-          </a:p>
-          <a:p>
-            <a:pPr/>
-            <a:r>
-              <a:t>Agent-to-Agent (A2A) protocol support for multi-agent workflows</a:t>
-            </a:r>
-          </a:p>
-          <a:p>
-            <a:pPr/>
-            <a:r>
-              <a:t>Performance optimization: Dask distributed scheduling at scale</a:t>
-            </a:r>
-          </a:p>
-        </p:txBody>
-      </p:sp>
-      <p:sp>
-        <p:nvSpPr>
-          <p:cNvPr id="6" name="Content Placeholder 5"/>
-          <p:cNvSpPr>
-            <a:spLocks noGrp="1"/>
-          </p:cNvSpPr>
-          <p:nvPr>
-            <p:ph idx="20" sz="quarter"/>
-          </p:nvPr>
-        </p:nvSpPr>
-        <p:spPr/>
-        <p:txBody>
-          <a:bodyPr/>
-          <a:lstStyle/>
-          <a:p>
-            <a:r>
               <a:rPr b="1"/>
-              <a:t>Year 3 (FY2028)</a:t>
-            </a:r>
-          </a:p>
-          <a:p>
-            <a:pPr/>
-            <a:r>
-              <a:t>Expand to full CMIP7 dataset support when available</a:t>
-            </a:r>
-          </a:p>
-          <a:p>
-            <a:pPr/>
-            <a:r>
-              <a:t>Community plugin architecture for user-contributed tools</a:t>
-            </a:r>
-          </a:p>
-          <a:p>
-            <a:pPr/>
-            <a:r>
-              <a:t>Uncertainty quantification &amp; confidence intervals in all outputs</a:t>
-            </a:r>
-          </a:p>
-          <a:p>
-            <a:pPr/>
-            <a:r>
-              <a:t>Regional downscaling pipelines (LOCA2, STAR-ESDM)</a:t>
-            </a:r>
-          </a:p>
-          <a:p>
-            <a:pPr/>
-            <a:r>
-              <a:t>Policy-ready climate risk assessment workflows</a:t>
-            </a:r>
-          </a:p>
-          <a:p>
-            <a:pPr/>
-            <a:r>
-              <a:t>Integration with Jupyter/CoPilot ecosystems</a:t>
-            </a:r>
-          </a:p>
-          <a:p>
-            <a:pPr/>
-            <a:r>
-              <a:t>Multi-language support for global accessibility</a:t>
+              <a:t>Caching &amp; Tooling</a:t>
+            </a:r>
+          </a:p>
+          <a:p>
+            <a:pPr lvl="1"/>
+            <a:r>
+              <a:t>Compressed Disk Cache: zlib-compressed NetCDF files reduce cache size by 60–70%</a:t>
+            </a:r>
+          </a:p>
+          <a:p>
+            <a:pPr lvl="1"/>
+            <a:r>
+              <a:t>Pre-computed Statistics: mean, std, min, max cached alongside data subsets for instant retrieval</a:t>
+            </a:r>
+          </a:p>
+          <a:p>
+            <a:pPr lvl="1"/>
+            <a:r>
+              <a:t>Warmup CLI (rcmes-warmup): Pre-downloads popular model/scenario/region combos</a:t>
+            </a:r>
+          </a:p>
+          <a:p>
+            <a:pPr lvl="1"/>
+            <a:r>
+              <a:t> — 5 built-in regions: CONUS, California, Europe, South Asia, East Africa</a:t>
+            </a:r>
+          </a:p>
+          <a:p>
+            <a:pPr lvl="1"/>
+            <a:r>
+              <a:t> — Supports --dry-run, --cache-refs-only, --all-models</a:t>
             </a:r>
           </a:p>
         </p:txBody>
@@ -19030,6 +19021,197 @@
         <p:nvPr/>
       </p:nvGrpSpPr>
       <p:grpSpPr/>
+      <p:sp>
+        <p:nvSpPr>
+          <p:cNvPr id="2" name="Text Placeholder 1"/>
+          <p:cNvSpPr>
+            <a:spLocks noGrp="1"/>
+          </p:cNvSpPr>
+          <p:nvPr>
+            <p:ph type="body" idx="17" sz="quarter"/>
+          </p:nvPr>
+        </p:nvSpPr>
+        <p:spPr/>
+        <p:txBody>
+          <a:bodyPr/>
+          <a:lstStyle/>
+          <a:p>
+            <a:r>
+              <a:t>RCMES-MCP</a:t>
+            </a:r>
+          </a:p>
+        </p:txBody>
+      </p:sp>
+      <p:sp>
+        <p:nvSpPr>
+          <p:cNvPr id="3" name="Title 2"/>
+          <p:cNvSpPr>
+            <a:spLocks noGrp="1"/>
+          </p:cNvSpPr>
+          <p:nvPr>
+            <p:ph type="title"/>
+          </p:nvPr>
+        </p:nvSpPr>
+        <p:spPr/>
+        <p:txBody>
+          <a:bodyPr/>
+          <a:lstStyle/>
+          <a:p>
+            <a:r>
+              <a:t>Development Roadmap: Years 2-3</a:t>
+            </a:r>
+          </a:p>
+        </p:txBody>
+      </p:sp>
+      <p:sp>
+        <p:nvSpPr>
+          <p:cNvPr id="4" name="Text Placeholder 3"/>
+          <p:cNvSpPr>
+            <a:spLocks noGrp="1"/>
+          </p:cNvSpPr>
+          <p:nvPr>
+            <p:ph type="body" idx="14" sz="quarter"/>
+          </p:nvPr>
+        </p:nvSpPr>
+        <p:spPr/>
+        <p:txBody>
+          <a:bodyPr/>
+          <a:lstStyle/>
+          <a:p>
+            <a:r>
+              <a:t>Next Steps for Expanding Capability, Community, and Impact (2027-2028)</a:t>
+            </a:r>
+          </a:p>
+        </p:txBody>
+      </p:sp>
+      <p:sp>
+        <p:nvSpPr>
+          <p:cNvPr id="5" name="Content Placeholder 4"/>
+          <p:cNvSpPr>
+            <a:spLocks noGrp="1"/>
+          </p:cNvSpPr>
+          <p:nvPr>
+            <p:ph idx="19" sz="quarter"/>
+          </p:nvPr>
+        </p:nvSpPr>
+        <p:spPr/>
+        <p:txBody>
+          <a:bodyPr/>
+          <a:lstStyle/>
+          <a:p>
+            <a:r>
+              <a:rPr b="1"/>
+              <a:t>Year 2 (FY2027)</a:t>
+            </a:r>
+          </a:p>
+          <a:p>
+            <a:pPr/>
+            <a:r>
+              <a:t>Integrate MERRA-2, ECCO &amp; GLDAS observational datasets</a:t>
+            </a:r>
+          </a:p>
+          <a:p>
+            <a:pPr/>
+            <a:r>
+              <a:t>Model evaluation framework: obs vs. CMIP6 bias/skill scoring</a:t>
+            </a:r>
+          </a:p>
+          <a:p>
+            <a:pPr/>
+            <a:r>
+              <a:t>Multi-model ensemble analysis with model weighting</a:t>
+            </a:r>
+          </a:p>
+          <a:p>
+            <a:pPr/>
+            <a:r>
+              <a:t>NASA Earthdata authentication &amp; access integration</a:t>
+            </a:r>
+          </a:p>
+          <a:p>
+            <a:pPr/>
+            <a:r>
+              <a:t>Automated reproducible report generation (PDF/HTML)</a:t>
+            </a:r>
+          </a:p>
+          <a:p>
+            <a:pPr/>
+            <a:r>
+              <a:t>Agent-to-Agent (A2A) protocol support for multi-agent workflows</a:t>
+            </a:r>
+          </a:p>
+          <a:p>
+            <a:pPr/>
+            <a:r>
+              <a:t>Performance optimization: Dask distributed scheduling at scale</a:t>
+            </a:r>
+          </a:p>
+        </p:txBody>
+      </p:sp>
+      <p:sp>
+        <p:nvSpPr>
+          <p:cNvPr id="6" name="Content Placeholder 5"/>
+          <p:cNvSpPr>
+            <a:spLocks noGrp="1"/>
+          </p:cNvSpPr>
+          <p:nvPr>
+            <p:ph idx="20" sz="quarter"/>
+          </p:nvPr>
+        </p:nvSpPr>
+        <p:spPr/>
+        <p:txBody>
+          <a:bodyPr/>
+          <a:lstStyle/>
+          <a:p>
+            <a:r>
+              <a:rPr b="1"/>
+              <a:t>Year 3 (FY2028)</a:t>
+            </a:r>
+          </a:p>
+          <a:p>
+            <a:pPr/>
+            <a:r>
+              <a:t>Expand to full CMIP7 dataset support when available</a:t>
+            </a:r>
+          </a:p>
+          <a:p>
+            <a:pPr/>
+            <a:r>
+              <a:t>Community plugin architecture for user-contributed tools</a:t>
+            </a:r>
+          </a:p>
+          <a:p>
+            <a:pPr/>
+            <a:r>
+              <a:t>Uncertainty quantification &amp; confidence intervals in all outputs</a:t>
+            </a:r>
+          </a:p>
+          <a:p>
+            <a:pPr/>
+            <a:r>
+              <a:t>Regional downscaling pipelines (LOCA2, STAR-ESDM)</a:t>
+            </a:r>
+          </a:p>
+          <a:p>
+            <a:pPr/>
+            <a:r>
+              <a:t>Policy-ready climate risk assessment workflows</a:t>
+            </a:r>
+          </a:p>
+          <a:p>
+            <a:pPr/>
+            <a:r>
+              <a:t>Integration with Jupyter/CoPilot ecosystems</a:t>
+            </a:r>
+          </a:p>
+          <a:p>
+            <a:pPr/>
+            <a:r>
+              <a:t>Multi-language support for global accessibility</a:t>
+            </a:r>
+          </a:p>
+        </p:txBody>
+      </p:sp>
     </p:spTree>
   </p:cSld>
   <p:clrMapOvr>
